--- a/code and validation.pptx
+++ b/code and validation.pptx
@@ -5,18 +5,21 @@
     <p:sldMasterId id="2147483648" r:id="rId1"/>
   </p:sldMasterIdLst>
   <p:notesMasterIdLst>
-    <p:notesMasterId r:id="rId11"/>
+    <p:notesMasterId r:id="rId14"/>
   </p:notesMasterIdLst>
   <p:sldIdLst>
     <p:sldId id="256" r:id="rId2"/>
-    <p:sldId id="257" r:id="rId3"/>
-    <p:sldId id="258" r:id="rId4"/>
-    <p:sldId id="260" r:id="rId5"/>
-    <p:sldId id="261" r:id="rId6"/>
-    <p:sldId id="259" r:id="rId7"/>
-    <p:sldId id="262" r:id="rId8"/>
-    <p:sldId id="263" r:id="rId9"/>
-    <p:sldId id="264" r:id="rId10"/>
+    <p:sldId id="267" r:id="rId3"/>
+    <p:sldId id="257" r:id="rId4"/>
+    <p:sldId id="258" r:id="rId5"/>
+    <p:sldId id="260" r:id="rId6"/>
+    <p:sldId id="261" r:id="rId7"/>
+    <p:sldId id="259" r:id="rId8"/>
+    <p:sldId id="266" r:id="rId9"/>
+    <p:sldId id="262" r:id="rId10"/>
+    <p:sldId id="263" r:id="rId11"/>
+    <p:sldId id="264" r:id="rId12"/>
+    <p:sldId id="265" r:id="rId13"/>
   </p:sldIdLst>
   <p:sldSz cx="12192000" cy="6858000"/>
   <p:notesSz cx="6858000" cy="9144000"/>
@@ -205,7 +208,7 @@
           <a:p>
             <a:fld id="{6DC8E0B5-9F8A-4D58-BE6F-8A643D5E80AF}" type="datetimeFigureOut">
               <a:rPr lang="zh-CN" altLang="en-US" smtClean="0"/>
-              <a:t>2026/6/11</a:t>
+              <a:t>2026/6/18</a:t>
             </a:fld>
             <a:endParaRPr lang="zh-CN" altLang="en-US"/>
           </a:p>
@@ -538,7 +541,7 @@
           <a:p>
             <a:fld id="{307FD9E6-C079-4E9B-99D0-1F904BCAE1F8}" type="slidenum">
               <a:rPr lang="zh-CN" altLang="en-US" smtClean="0"/>
-              <a:t>7</a:t>
+              <a:t>9</a:t>
             </a:fld>
             <a:endParaRPr lang="zh-CN" altLang="en-US"/>
           </a:p>
@@ -706,7 +709,7 @@
           <a:p>
             <a:fld id="{E6BA4B27-A32D-434B-B983-E08B7F97CD8F}" type="datetimeFigureOut">
               <a:rPr lang="zh-CN" altLang="en-US" smtClean="0"/>
-              <a:t>2026/6/11</a:t>
+              <a:t>2026/6/18</a:t>
             </a:fld>
             <a:endParaRPr lang="zh-CN" altLang="en-US"/>
           </a:p>
@@ -906,7 +909,7 @@
           <a:p>
             <a:fld id="{E6BA4B27-A32D-434B-B983-E08B7F97CD8F}" type="datetimeFigureOut">
               <a:rPr lang="zh-CN" altLang="en-US" smtClean="0"/>
-              <a:t>2026/6/11</a:t>
+              <a:t>2026/6/18</a:t>
             </a:fld>
             <a:endParaRPr lang="zh-CN" altLang="en-US"/>
           </a:p>
@@ -1116,7 +1119,7 @@
           <a:p>
             <a:fld id="{E6BA4B27-A32D-434B-B983-E08B7F97CD8F}" type="datetimeFigureOut">
               <a:rPr lang="zh-CN" altLang="en-US" smtClean="0"/>
-              <a:t>2026/6/11</a:t>
+              <a:t>2026/6/18</a:t>
             </a:fld>
             <a:endParaRPr lang="zh-CN" altLang="en-US"/>
           </a:p>
@@ -1316,7 +1319,7 @@
           <a:p>
             <a:fld id="{E6BA4B27-A32D-434B-B983-E08B7F97CD8F}" type="datetimeFigureOut">
               <a:rPr lang="zh-CN" altLang="en-US" smtClean="0"/>
-              <a:t>2026/6/11</a:t>
+              <a:t>2026/6/18</a:t>
             </a:fld>
             <a:endParaRPr lang="zh-CN" altLang="en-US"/>
           </a:p>
@@ -1592,7 +1595,7 @@
           <a:p>
             <a:fld id="{E6BA4B27-A32D-434B-B983-E08B7F97CD8F}" type="datetimeFigureOut">
               <a:rPr lang="zh-CN" altLang="en-US" smtClean="0"/>
-              <a:t>2026/6/11</a:t>
+              <a:t>2026/6/18</a:t>
             </a:fld>
             <a:endParaRPr lang="zh-CN" altLang="en-US"/>
           </a:p>
@@ -1860,7 +1863,7 @@
           <a:p>
             <a:fld id="{E6BA4B27-A32D-434B-B983-E08B7F97CD8F}" type="datetimeFigureOut">
               <a:rPr lang="zh-CN" altLang="en-US" smtClean="0"/>
-              <a:t>2026/6/11</a:t>
+              <a:t>2026/6/18</a:t>
             </a:fld>
             <a:endParaRPr lang="zh-CN" altLang="en-US"/>
           </a:p>
@@ -2275,7 +2278,7 @@
           <a:p>
             <a:fld id="{E6BA4B27-A32D-434B-B983-E08B7F97CD8F}" type="datetimeFigureOut">
               <a:rPr lang="zh-CN" altLang="en-US" smtClean="0"/>
-              <a:t>2026/6/11</a:t>
+              <a:t>2026/6/18</a:t>
             </a:fld>
             <a:endParaRPr lang="zh-CN" altLang="en-US"/>
           </a:p>
@@ -2417,7 +2420,7 @@
           <a:p>
             <a:fld id="{E6BA4B27-A32D-434B-B983-E08B7F97CD8F}" type="datetimeFigureOut">
               <a:rPr lang="zh-CN" altLang="en-US" smtClean="0"/>
-              <a:t>2026/6/11</a:t>
+              <a:t>2026/6/18</a:t>
             </a:fld>
             <a:endParaRPr lang="zh-CN" altLang="en-US"/>
           </a:p>
@@ -2530,7 +2533,7 @@
           <a:p>
             <a:fld id="{E6BA4B27-A32D-434B-B983-E08B7F97CD8F}" type="datetimeFigureOut">
               <a:rPr lang="zh-CN" altLang="en-US" smtClean="0"/>
-              <a:t>2026/6/11</a:t>
+              <a:t>2026/6/18</a:t>
             </a:fld>
             <a:endParaRPr lang="zh-CN" altLang="en-US"/>
           </a:p>
@@ -2843,7 +2846,7 @@
           <a:p>
             <a:fld id="{E6BA4B27-A32D-434B-B983-E08B7F97CD8F}" type="datetimeFigureOut">
               <a:rPr lang="zh-CN" altLang="en-US" smtClean="0"/>
-              <a:t>2026/6/11</a:t>
+              <a:t>2026/6/18</a:t>
             </a:fld>
             <a:endParaRPr lang="zh-CN" altLang="en-US"/>
           </a:p>
@@ -3132,7 +3135,7 @@
           <a:p>
             <a:fld id="{E6BA4B27-A32D-434B-B983-E08B7F97CD8F}" type="datetimeFigureOut">
               <a:rPr lang="zh-CN" altLang="en-US" smtClean="0"/>
-              <a:t>2026/6/11</a:t>
+              <a:t>2026/6/18</a:t>
             </a:fld>
             <a:endParaRPr lang="zh-CN" altLang="en-US"/>
           </a:p>
@@ -3375,7 +3378,7 @@
           <a:p>
             <a:fld id="{E6BA4B27-A32D-434B-B983-E08B7F97CD8F}" type="datetimeFigureOut">
               <a:rPr lang="zh-CN" altLang="en-US" smtClean="0"/>
-              <a:t>2026/6/11</a:t>
+              <a:t>2026/6/18</a:t>
             </a:fld>
             <a:endParaRPr lang="zh-CN" altLang="en-US"/>
           </a:p>
@@ -3855,7 +3858,7 @@
 </p:sld>
 </file>
 
-<file path=ppt/slides/slide2.xml><?xml version="1.0" encoding="utf-8"?>
+<file path=ppt/slides/slide10.xml><?xml version="1.0" encoding="utf-8"?>
 <p:sld xmlns:a="http://schemas.openxmlformats.org/drawingml/2006/main" xmlns:r="http://schemas.openxmlformats.org/officeDocument/2006/relationships" xmlns:p="http://schemas.openxmlformats.org/presentationml/2006/main">
   <p:cSld>
     <p:spTree>
@@ -3877,7 +3880,7 @@
           <p:cNvPr id="2" name="Title 1">
             <a:extLst>
               <a:ext uri="{FF2B5EF4-FFF2-40B4-BE49-F238E27FC236}">
-                <a16:creationId xmlns:a16="http://schemas.microsoft.com/office/drawing/2014/main" id="{3C2E9CD7-B30C-9EBD-503B-0E24D0A0AF8A}"/>
+                <a16:creationId xmlns:a16="http://schemas.microsoft.com/office/drawing/2014/main" id="{2DCE93DC-C6A9-E1C9-319C-847EC6423BC7}"/>
               </a:ext>
             </a:extLst>
           </p:cNvPr>
@@ -3895,7 +3898,7 @@
           <a:p>
             <a:r>
               <a:rPr lang="en-US" altLang="zh-CN" dirty="0"/>
-              <a:t>Run_RTM_1D_PDE.m</a:t>
+              <a:t>Geneva 1</a:t>
             </a:r>
             <a:endParaRPr lang="zh-CN" altLang="en-US" dirty="0"/>
           </a:p>
@@ -3906,7 +3909,7 @@
           <p:cNvPr id="3" name="Content Placeholder 2">
             <a:extLst>
               <a:ext uri="{FF2B5EF4-FFF2-40B4-BE49-F238E27FC236}">
-                <a16:creationId xmlns:a16="http://schemas.microsoft.com/office/drawing/2014/main" id="{B023166B-72E2-B8A9-7E33-A8D033FB84B6}"/>
+                <a16:creationId xmlns:a16="http://schemas.microsoft.com/office/drawing/2014/main" id="{ADA9E384-6824-1ECD-0EBC-D33D3BDC8EFC}"/>
               </a:ext>
             </a:extLst>
           </p:cNvPr>
@@ -3919,115 +3922,816 @@
         </p:nvSpPr>
         <p:spPr/>
         <p:txBody>
-          <a:bodyPr>
-            <a:normAutofit fontScale="55000" lnSpcReduction="20000"/>
-          </a:bodyPr>
-          <a:lstStyle/>
-          <a:p>
-            <a:r>
-              <a:rPr lang="en-US" altLang="zh-CN" dirty="0"/>
-              <a:t>Config / Params</a:t>
-            </a:r>
-          </a:p>
-          <a:p>
-            <a:r>
-              <a:rPr lang="en-US" altLang="zh-CN" dirty="0"/>
-              <a:t>   ↓</a:t>
-            </a:r>
-          </a:p>
-          <a:p>
-            <a:r>
-              <a:rPr lang="en-US" altLang="zh-CN" dirty="0"/>
-              <a:t>Grid</a:t>
-            </a:r>
-          </a:p>
-          <a:p>
-            <a:r>
-              <a:rPr lang="en-US" altLang="zh-CN" dirty="0"/>
-              <a:t>   ↓</a:t>
-            </a:r>
-          </a:p>
-          <a:p>
-            <a:r>
-              <a:rPr lang="en-US" altLang="zh-CN" dirty="0"/>
-              <a:t>Forcing</a:t>
-            </a:r>
-          </a:p>
-          <a:p>
-            <a:r>
-              <a:rPr lang="en-US" altLang="zh-CN" dirty="0"/>
-              <a:t>   ↓</a:t>
-            </a:r>
-          </a:p>
-          <a:p>
-            <a:r>
-              <a:rPr lang="en-US" altLang="zh-CN" dirty="0"/>
-              <a:t>Initial State</a:t>
-            </a:r>
-          </a:p>
-          <a:p>
-            <a:r>
-              <a:rPr lang="en-US" altLang="zh-CN" dirty="0"/>
-              <a:t>   ↓</a:t>
-            </a:r>
-          </a:p>
-          <a:p>
-            <a:r>
-              <a:rPr lang="en-US" altLang="zh-CN" dirty="0"/>
-              <a:t>Pack into Y0</a:t>
-            </a:r>
-          </a:p>
-          <a:p>
-            <a:r>
-              <a:rPr lang="en-US" altLang="zh-CN" dirty="0"/>
-              <a:t>   ↓</a:t>
-            </a:r>
-          </a:p>
-          <a:p>
-            <a:r>
-              <a:rPr lang="en-US" altLang="zh-CN" dirty="0"/>
-              <a:t>ode15s solves </a:t>
-            </a:r>
-            <a:r>
-              <a:rPr lang="en-US" altLang="zh-CN" dirty="0" err="1"/>
-              <a:t>dY</a:t>
-            </a:r>
-            <a:r>
-              <a:rPr lang="en-US" altLang="zh-CN" dirty="0"/>
-              <a:t>/dt = RTM_PDE_RHS</a:t>
-            </a:r>
-          </a:p>
-          <a:p>
-            <a:r>
-              <a:rPr lang="en-US" altLang="zh-CN" dirty="0"/>
-              <a:t>   ↓</a:t>
-            </a:r>
-          </a:p>
-          <a:p>
-            <a:r>
-              <a:rPr lang="en-US" altLang="zh-CN" dirty="0"/>
-              <a:t>Unpack final state</a:t>
-            </a:r>
-          </a:p>
-          <a:p>
-            <a:r>
-              <a:rPr lang="en-US" altLang="zh-CN" dirty="0"/>
-              <a:t>   ↓</a:t>
-            </a:r>
-          </a:p>
-          <a:p>
-            <a:r>
-              <a:rPr lang="en-US" altLang="zh-CN" dirty="0"/>
-              <a:t>Reaction diagnostics / summary / plot</a:t>
-            </a:r>
-            <a:endParaRPr lang="zh-CN" altLang="en-US" dirty="0"/>
-          </a:p>
-        </p:txBody>
-      </p:sp>
+          <a:bodyPr/>
+          <a:lstStyle/>
+          <a:p>
+            <a:endParaRPr lang="zh-CN" altLang="en-US"/>
+          </a:p>
+        </p:txBody>
+      </p:sp>
+      <p:pic>
+        <p:nvPicPr>
+          <p:cNvPr id="6" name="Picture 5">
+            <a:extLst>
+              <a:ext uri="{FF2B5EF4-FFF2-40B4-BE49-F238E27FC236}">
+                <a16:creationId xmlns:a16="http://schemas.microsoft.com/office/drawing/2014/main" id="{605F6E41-94B2-CB3A-3F8F-C5B6B07CEFEC}"/>
+              </a:ext>
+            </a:extLst>
+          </p:cNvPr>
+          <p:cNvPicPr>
+            <a:picLocks noChangeAspect="1"/>
+          </p:cNvPicPr>
+          <p:nvPr/>
+        </p:nvPicPr>
+        <p:blipFill>
+          <a:blip r:embed="rId2"/>
+          <a:stretch>
+            <a:fillRect/>
+          </a:stretch>
+        </p:blipFill>
+        <p:spPr>
+          <a:xfrm>
+            <a:off x="0" y="2026750"/>
+            <a:ext cx="11608397" cy="4826248"/>
+          </a:xfrm>
+          <a:prstGeom prst="rect">
+            <a:avLst/>
+          </a:prstGeom>
+        </p:spPr>
+      </p:pic>
+      <p:pic>
+        <p:nvPicPr>
+          <p:cNvPr id="8" name="Picture 7">
+            <a:extLst>
+              <a:ext uri="{FF2B5EF4-FFF2-40B4-BE49-F238E27FC236}">
+                <a16:creationId xmlns:a16="http://schemas.microsoft.com/office/drawing/2014/main" id="{F36CB3C4-6C42-19C9-3978-84A7668A7ECF}"/>
+              </a:ext>
+            </a:extLst>
+          </p:cNvPr>
+          <p:cNvPicPr>
+            <a:picLocks noChangeAspect="1"/>
+          </p:cNvPicPr>
+          <p:nvPr/>
+        </p:nvPicPr>
+        <p:blipFill>
+          <a:blip r:embed="rId3"/>
+          <a:stretch>
+            <a:fillRect/>
+          </a:stretch>
+        </p:blipFill>
+        <p:spPr>
+          <a:xfrm>
+            <a:off x="3320929" y="-878155"/>
+            <a:ext cx="8160169" cy="2806844"/>
+          </a:xfrm>
+          <a:prstGeom prst="rect">
+            <a:avLst/>
+          </a:prstGeom>
+        </p:spPr>
+      </p:pic>
+      <p:pic>
+        <p:nvPicPr>
+          <p:cNvPr id="10" name="Picture 9">
+            <a:extLst>
+              <a:ext uri="{FF2B5EF4-FFF2-40B4-BE49-F238E27FC236}">
+                <a16:creationId xmlns:a16="http://schemas.microsoft.com/office/drawing/2014/main" id="{F6FED26D-906C-2AB8-502F-9FA648A3C455}"/>
+              </a:ext>
+            </a:extLst>
+          </p:cNvPr>
+          <p:cNvPicPr>
+            <a:picLocks noChangeAspect="1"/>
+          </p:cNvPicPr>
+          <p:nvPr/>
+        </p:nvPicPr>
+        <p:blipFill>
+          <a:blip r:embed="rId4"/>
+          <a:stretch>
+            <a:fillRect/>
+          </a:stretch>
+        </p:blipFill>
+        <p:spPr>
+          <a:xfrm>
+            <a:off x="6026314" y="4316016"/>
+            <a:ext cx="8198271" cy="2883048"/>
+          </a:xfrm>
+          <a:prstGeom prst="rect">
+            <a:avLst/>
+          </a:prstGeom>
+        </p:spPr>
+      </p:pic>
+      <p:pic>
+        <p:nvPicPr>
+          <p:cNvPr id="12" name="Picture 11">
+            <a:extLst>
+              <a:ext uri="{FF2B5EF4-FFF2-40B4-BE49-F238E27FC236}">
+                <a16:creationId xmlns:a16="http://schemas.microsoft.com/office/drawing/2014/main" id="{E49D340B-AF36-F0D4-BD65-9532E96B5589}"/>
+              </a:ext>
+            </a:extLst>
+          </p:cNvPr>
+          <p:cNvPicPr>
+            <a:picLocks noChangeAspect="1"/>
+          </p:cNvPicPr>
+          <p:nvPr/>
+        </p:nvPicPr>
+        <p:blipFill>
+          <a:blip r:embed="rId5"/>
+          <a:stretch>
+            <a:fillRect/>
+          </a:stretch>
+        </p:blipFill>
+        <p:spPr>
+          <a:xfrm>
+            <a:off x="2346154" y="1928689"/>
+            <a:ext cx="1949550" cy="2552831"/>
+          </a:xfrm>
+          <a:prstGeom prst="rect">
+            <a:avLst/>
+          </a:prstGeom>
+        </p:spPr>
+      </p:pic>
     </p:spTree>
     <p:extLst>
       <p:ext uri="{BB962C8B-B14F-4D97-AF65-F5344CB8AC3E}">
-        <p14:creationId xmlns:p14="http://schemas.microsoft.com/office/powerpoint/2010/main" val="3853370587"/>
+        <p14:creationId xmlns:p14="http://schemas.microsoft.com/office/powerpoint/2010/main" val="3260038964"/>
+      </p:ext>
+    </p:extLst>
+  </p:cSld>
+  <p:clrMapOvr>
+    <a:masterClrMapping/>
+  </p:clrMapOvr>
+</p:sld>
+</file>
+
+<file path=ppt/slides/slide11.xml><?xml version="1.0" encoding="utf-8"?>
+<p:sld xmlns:a="http://schemas.openxmlformats.org/drawingml/2006/main" xmlns:r="http://schemas.openxmlformats.org/officeDocument/2006/relationships" xmlns:p="http://schemas.openxmlformats.org/presentationml/2006/main">
+  <p:cSld>
+    <p:spTree>
+      <p:nvGrpSpPr>
+        <p:cNvPr id="1" name=""/>
+        <p:cNvGrpSpPr/>
+        <p:nvPr/>
+      </p:nvGrpSpPr>
+      <p:grpSpPr>
+        <a:xfrm>
+          <a:off x="0" y="0"/>
+          <a:ext cx="0" cy="0"/>
+          <a:chOff x="0" y="0"/>
+          <a:chExt cx="0" cy="0"/>
+        </a:xfrm>
+      </p:grpSpPr>
+      <p:sp>
+        <p:nvSpPr>
+          <p:cNvPr id="2" name="Title 1">
+            <a:extLst>
+              <a:ext uri="{FF2B5EF4-FFF2-40B4-BE49-F238E27FC236}">
+                <a16:creationId xmlns:a16="http://schemas.microsoft.com/office/drawing/2014/main" id="{2FEAD2D6-CDBD-29F0-7419-3037FD48219B}"/>
+              </a:ext>
+            </a:extLst>
+          </p:cNvPr>
+          <p:cNvSpPr>
+            <a:spLocks noGrp="1"/>
+          </p:cNvSpPr>
+          <p:nvPr>
+            <p:ph type="title"/>
+          </p:nvPr>
+        </p:nvSpPr>
+        <p:spPr/>
+        <p:txBody>
+          <a:bodyPr/>
+          <a:lstStyle/>
+          <a:p>
+            <a:r>
+              <a:rPr lang="en-US" altLang="zh-CN" dirty="0"/>
+              <a:t>Geneva 4 old</a:t>
+            </a:r>
+            <a:endParaRPr lang="zh-CN" altLang="en-US" dirty="0"/>
+          </a:p>
+        </p:txBody>
+      </p:sp>
+      <p:sp>
+        <p:nvSpPr>
+          <p:cNvPr id="3" name="Content Placeholder 2">
+            <a:extLst>
+              <a:ext uri="{FF2B5EF4-FFF2-40B4-BE49-F238E27FC236}">
+                <a16:creationId xmlns:a16="http://schemas.microsoft.com/office/drawing/2014/main" id="{A6299F5C-8D3A-CD17-31FA-DA1BEAFB0178}"/>
+              </a:ext>
+            </a:extLst>
+          </p:cNvPr>
+          <p:cNvSpPr>
+            <a:spLocks noGrp="1"/>
+          </p:cNvSpPr>
+          <p:nvPr>
+            <p:ph idx="1"/>
+          </p:nvPr>
+        </p:nvSpPr>
+        <p:spPr/>
+        <p:txBody>
+          <a:bodyPr/>
+          <a:lstStyle/>
+          <a:p>
+            <a:endParaRPr lang="zh-CN" altLang="en-US"/>
+          </a:p>
+        </p:txBody>
+      </p:sp>
+      <p:pic>
+        <p:nvPicPr>
+          <p:cNvPr id="5" name="Picture 4">
+            <a:extLst>
+              <a:ext uri="{FF2B5EF4-FFF2-40B4-BE49-F238E27FC236}">
+                <a16:creationId xmlns:a16="http://schemas.microsoft.com/office/drawing/2014/main" id="{5E00D8BC-06AB-C8A7-17D3-96D773CB6525}"/>
+              </a:ext>
+            </a:extLst>
+          </p:cNvPr>
+          <p:cNvPicPr>
+            <a:picLocks noChangeAspect="1"/>
+          </p:cNvPicPr>
+          <p:nvPr/>
+        </p:nvPicPr>
+        <p:blipFill>
+          <a:blip r:embed="rId2"/>
+          <a:stretch>
+            <a:fillRect/>
+          </a:stretch>
+        </p:blipFill>
+        <p:spPr>
+          <a:xfrm>
+            <a:off x="310852" y="1578644"/>
+            <a:ext cx="11570295" cy="4845299"/>
+          </a:xfrm>
+          <a:prstGeom prst="rect">
+            <a:avLst/>
+          </a:prstGeom>
+        </p:spPr>
+      </p:pic>
+      <p:pic>
+        <p:nvPicPr>
+          <p:cNvPr id="7" name="Picture 6">
+            <a:extLst>
+              <a:ext uri="{FF2B5EF4-FFF2-40B4-BE49-F238E27FC236}">
+                <a16:creationId xmlns:a16="http://schemas.microsoft.com/office/drawing/2014/main" id="{C9091CC3-DAE3-4B86-6A6B-65B2FA0976D3}"/>
+              </a:ext>
+            </a:extLst>
+          </p:cNvPr>
+          <p:cNvPicPr>
+            <a:picLocks noChangeAspect="1"/>
+          </p:cNvPicPr>
+          <p:nvPr/>
+        </p:nvPicPr>
+        <p:blipFill>
+          <a:blip r:embed="rId3"/>
+          <a:stretch>
+            <a:fillRect/>
+          </a:stretch>
+        </p:blipFill>
+        <p:spPr>
+          <a:xfrm>
+            <a:off x="6391915" y="4001293"/>
+            <a:ext cx="8020462" cy="3073558"/>
+          </a:xfrm>
+          <a:prstGeom prst="rect">
+            <a:avLst/>
+          </a:prstGeom>
+        </p:spPr>
+      </p:pic>
+      <p:pic>
+        <p:nvPicPr>
+          <p:cNvPr id="9" name="Picture 8">
+            <a:extLst>
+              <a:ext uri="{FF2B5EF4-FFF2-40B4-BE49-F238E27FC236}">
+                <a16:creationId xmlns:a16="http://schemas.microsoft.com/office/drawing/2014/main" id="{BF3D6A23-7481-0AD4-5AC2-FADD30B421C6}"/>
+              </a:ext>
+            </a:extLst>
+          </p:cNvPr>
+          <p:cNvPicPr>
+            <a:picLocks noChangeAspect="1"/>
+          </p:cNvPicPr>
+          <p:nvPr/>
+        </p:nvPicPr>
+        <p:blipFill>
+          <a:blip r:embed="rId4"/>
+          <a:stretch>
+            <a:fillRect/>
+          </a:stretch>
+        </p:blipFill>
+        <p:spPr>
+          <a:xfrm>
+            <a:off x="4114419" y="-1020036"/>
+            <a:ext cx="7417181" cy="2635385"/>
+          </a:xfrm>
+          <a:prstGeom prst="rect">
+            <a:avLst/>
+          </a:prstGeom>
+        </p:spPr>
+      </p:pic>
+      <p:pic>
+        <p:nvPicPr>
+          <p:cNvPr id="11" name="Picture 10">
+            <a:extLst>
+              <a:ext uri="{FF2B5EF4-FFF2-40B4-BE49-F238E27FC236}">
+                <a16:creationId xmlns:a16="http://schemas.microsoft.com/office/drawing/2014/main" id="{4BCC2E44-05AA-166B-1520-F8E4E772472D}"/>
+              </a:ext>
+            </a:extLst>
+          </p:cNvPr>
+          <p:cNvPicPr>
+            <a:picLocks noChangeAspect="1"/>
+          </p:cNvPicPr>
+          <p:nvPr/>
+        </p:nvPicPr>
+        <p:blipFill>
+          <a:blip r:embed="rId5"/>
+          <a:stretch>
+            <a:fillRect/>
+          </a:stretch>
+        </p:blipFill>
+        <p:spPr>
+          <a:xfrm>
+            <a:off x="975947" y="4001293"/>
+            <a:ext cx="1847945" cy="2629035"/>
+          </a:xfrm>
+          <a:prstGeom prst="rect">
+            <a:avLst/>
+          </a:prstGeom>
+        </p:spPr>
+      </p:pic>
+    </p:spTree>
+    <p:extLst>
+      <p:ext uri="{BB962C8B-B14F-4D97-AF65-F5344CB8AC3E}">
+        <p14:creationId xmlns:p14="http://schemas.microsoft.com/office/powerpoint/2010/main" val="2392263516"/>
+      </p:ext>
+    </p:extLst>
+  </p:cSld>
+  <p:clrMapOvr>
+    <a:masterClrMapping/>
+  </p:clrMapOvr>
+</p:sld>
+</file>
+
+<file path=ppt/slides/slide12.xml><?xml version="1.0" encoding="utf-8"?>
+<p:sld xmlns:a="http://schemas.openxmlformats.org/drawingml/2006/main" xmlns:r="http://schemas.openxmlformats.org/officeDocument/2006/relationships" xmlns:p="http://schemas.openxmlformats.org/presentationml/2006/main">
+  <p:cSld>
+    <p:spTree>
+      <p:nvGrpSpPr>
+        <p:cNvPr id="1" name=""/>
+        <p:cNvGrpSpPr/>
+        <p:nvPr/>
+      </p:nvGrpSpPr>
+      <p:grpSpPr>
+        <a:xfrm>
+          <a:off x="0" y="0"/>
+          <a:ext cx="0" cy="0"/>
+          <a:chOff x="0" y="0"/>
+          <a:chExt cx="0" cy="0"/>
+        </a:xfrm>
+      </p:grpSpPr>
+      <p:sp>
+        <p:nvSpPr>
+          <p:cNvPr id="2" name="Title 1">
+            <a:extLst>
+              <a:ext uri="{FF2B5EF4-FFF2-40B4-BE49-F238E27FC236}">
+                <a16:creationId xmlns:a16="http://schemas.microsoft.com/office/drawing/2014/main" id="{B7E5A7B1-392B-A6C1-7EAC-F9BF8C20ADFC}"/>
+              </a:ext>
+            </a:extLst>
+          </p:cNvPr>
+          <p:cNvSpPr>
+            <a:spLocks noGrp="1"/>
+          </p:cNvSpPr>
+          <p:nvPr>
+            <p:ph type="title"/>
+          </p:nvPr>
+        </p:nvSpPr>
+        <p:spPr/>
+        <p:txBody>
+          <a:bodyPr/>
+          <a:lstStyle/>
+          <a:p>
+            <a:endParaRPr lang="zh-CN" altLang="en-US"/>
+          </a:p>
+        </p:txBody>
+      </p:sp>
+      <p:sp>
+        <p:nvSpPr>
+          <p:cNvPr id="3" name="Content Placeholder 2">
+            <a:extLst>
+              <a:ext uri="{FF2B5EF4-FFF2-40B4-BE49-F238E27FC236}">
+                <a16:creationId xmlns:a16="http://schemas.microsoft.com/office/drawing/2014/main" id="{5ECA9DA3-06D2-317A-8782-F2306FE6BFAF}"/>
+              </a:ext>
+            </a:extLst>
+          </p:cNvPr>
+          <p:cNvSpPr>
+            <a:spLocks noGrp="1"/>
+          </p:cNvSpPr>
+          <p:nvPr>
+            <p:ph idx="1"/>
+          </p:nvPr>
+        </p:nvSpPr>
+        <p:spPr/>
+        <p:txBody>
+          <a:bodyPr/>
+          <a:lstStyle/>
+          <a:p>
+            <a:endParaRPr lang="zh-CN" altLang="en-US"/>
+          </a:p>
+        </p:txBody>
+      </p:sp>
+      <p:pic>
+        <p:nvPicPr>
+          <p:cNvPr id="5" name="Picture 4">
+            <a:extLst>
+              <a:ext uri="{FF2B5EF4-FFF2-40B4-BE49-F238E27FC236}">
+                <a16:creationId xmlns:a16="http://schemas.microsoft.com/office/drawing/2014/main" id="{D3BEFB84-09DF-090E-3199-11C2982190DC}"/>
+              </a:ext>
+            </a:extLst>
+          </p:cNvPr>
+          <p:cNvPicPr>
+            <a:picLocks noChangeAspect="1"/>
+          </p:cNvPicPr>
+          <p:nvPr/>
+        </p:nvPicPr>
+        <p:blipFill>
+          <a:blip r:embed="rId2"/>
+          <a:stretch>
+            <a:fillRect/>
+          </a:stretch>
+        </p:blipFill>
+        <p:spPr>
+          <a:xfrm>
+            <a:off x="585942" y="129633"/>
+            <a:ext cx="10821647" cy="6818013"/>
+          </a:xfrm>
+          <a:prstGeom prst="rect">
+            <a:avLst/>
+          </a:prstGeom>
+        </p:spPr>
+      </p:pic>
+      <p:pic>
+        <p:nvPicPr>
+          <p:cNvPr id="9" name="Picture 8">
+            <a:extLst>
+              <a:ext uri="{FF2B5EF4-FFF2-40B4-BE49-F238E27FC236}">
+                <a16:creationId xmlns:a16="http://schemas.microsoft.com/office/drawing/2014/main" id="{87A4CC9F-E42D-18BE-31D6-74A0151F7E16}"/>
+              </a:ext>
+            </a:extLst>
+          </p:cNvPr>
+          <p:cNvPicPr>
+            <a:picLocks noChangeAspect="1"/>
+          </p:cNvPicPr>
+          <p:nvPr/>
+        </p:nvPicPr>
+        <p:blipFill>
+          <a:blip r:embed="rId3"/>
+          <a:srcRect l="7418" r="72325"/>
+          <a:stretch>
+            <a:fillRect/>
+          </a:stretch>
+        </p:blipFill>
+        <p:spPr>
+          <a:xfrm>
+            <a:off x="7689822" y="-33128"/>
+            <a:ext cx="1502517" cy="2635385"/>
+          </a:xfrm>
+          <a:prstGeom prst="rect">
+            <a:avLst/>
+          </a:prstGeom>
+        </p:spPr>
+      </p:pic>
+      <p:pic>
+        <p:nvPicPr>
+          <p:cNvPr id="10" name="Picture 9">
+            <a:extLst>
+              <a:ext uri="{FF2B5EF4-FFF2-40B4-BE49-F238E27FC236}">
+                <a16:creationId xmlns:a16="http://schemas.microsoft.com/office/drawing/2014/main" id="{D18BF909-CA3E-6BCB-9D17-ED01181354D0}"/>
+              </a:ext>
+            </a:extLst>
+          </p:cNvPr>
+          <p:cNvPicPr>
+            <a:picLocks noChangeAspect="1"/>
+          </p:cNvPicPr>
+          <p:nvPr/>
+        </p:nvPicPr>
+        <p:blipFill>
+          <a:blip r:embed="rId3"/>
+          <a:srcRect l="52766" t="2786" r="26997" b="2600"/>
+          <a:stretch>
+            <a:fillRect/>
+          </a:stretch>
+        </p:blipFill>
+        <p:spPr>
+          <a:xfrm>
+            <a:off x="4368241" y="2291913"/>
+            <a:ext cx="1500999" cy="2493452"/>
+          </a:xfrm>
+          <a:prstGeom prst="rect">
+            <a:avLst/>
+          </a:prstGeom>
+        </p:spPr>
+      </p:pic>
+      <p:pic>
+        <p:nvPicPr>
+          <p:cNvPr id="11" name="Picture 10">
+            <a:extLst>
+              <a:ext uri="{FF2B5EF4-FFF2-40B4-BE49-F238E27FC236}">
+                <a16:creationId xmlns:a16="http://schemas.microsoft.com/office/drawing/2014/main" id="{DB36AE70-7A67-52AA-31FB-AE119D5ADB79}"/>
+              </a:ext>
+            </a:extLst>
+          </p:cNvPr>
+          <p:cNvPicPr>
+            <a:picLocks noChangeAspect="1"/>
+          </p:cNvPicPr>
+          <p:nvPr/>
+        </p:nvPicPr>
+        <p:blipFill>
+          <a:blip r:embed="rId4"/>
+          <a:stretch>
+            <a:fillRect/>
+          </a:stretch>
+        </p:blipFill>
+        <p:spPr>
+          <a:xfrm>
+            <a:off x="2520296" y="-68902"/>
+            <a:ext cx="1847945" cy="2629035"/>
+          </a:xfrm>
+          <a:prstGeom prst="rect">
+            <a:avLst/>
+          </a:prstGeom>
+        </p:spPr>
+      </p:pic>
+      <p:pic>
+        <p:nvPicPr>
+          <p:cNvPr id="12" name="Picture 11">
+            <a:extLst>
+              <a:ext uri="{FF2B5EF4-FFF2-40B4-BE49-F238E27FC236}">
+                <a16:creationId xmlns:a16="http://schemas.microsoft.com/office/drawing/2014/main" id="{6111BA2F-970B-8215-C937-4AE5CB0D748B}"/>
+              </a:ext>
+            </a:extLst>
+          </p:cNvPr>
+          <p:cNvPicPr>
+            <a:picLocks noChangeAspect="1"/>
+          </p:cNvPicPr>
+          <p:nvPr/>
+        </p:nvPicPr>
+        <p:blipFill>
+          <a:blip r:embed="rId5"/>
+          <a:srcRect l="5913" r="74746" b="18691"/>
+          <a:stretch>
+            <a:fillRect/>
+          </a:stretch>
+        </p:blipFill>
+        <p:spPr>
+          <a:xfrm>
+            <a:off x="9440180" y="2394044"/>
+            <a:ext cx="1551216" cy="2499079"/>
+          </a:xfrm>
+          <a:prstGeom prst="rect">
+            <a:avLst/>
+          </a:prstGeom>
+        </p:spPr>
+      </p:pic>
+      <p:pic>
+        <p:nvPicPr>
+          <p:cNvPr id="13" name="Picture 12">
+            <a:extLst>
+              <a:ext uri="{FF2B5EF4-FFF2-40B4-BE49-F238E27FC236}">
+                <a16:creationId xmlns:a16="http://schemas.microsoft.com/office/drawing/2014/main" id="{81A29CB1-900D-49EE-B94B-B2DF5650868D}"/>
+              </a:ext>
+            </a:extLst>
+          </p:cNvPr>
+          <p:cNvPicPr>
+            <a:picLocks noChangeAspect="1"/>
+          </p:cNvPicPr>
+          <p:nvPr/>
+        </p:nvPicPr>
+        <p:blipFill>
+          <a:blip r:embed="rId5"/>
+          <a:srcRect l="29071" r="52606" b="16884"/>
+          <a:stretch>
+            <a:fillRect/>
+          </a:stretch>
+        </p:blipFill>
+        <p:spPr>
+          <a:xfrm>
+            <a:off x="996109" y="2338495"/>
+            <a:ext cx="1469572" cy="2554628"/>
+          </a:xfrm>
+          <a:prstGeom prst="rect">
+            <a:avLst/>
+          </a:prstGeom>
+        </p:spPr>
+      </p:pic>
+    </p:spTree>
+    <p:extLst>
+      <p:ext uri="{BB962C8B-B14F-4D97-AF65-F5344CB8AC3E}">
+        <p14:creationId xmlns:p14="http://schemas.microsoft.com/office/powerpoint/2010/main" val="531734051"/>
+      </p:ext>
+    </p:extLst>
+  </p:cSld>
+  <p:clrMapOvr>
+    <a:masterClrMapping/>
+  </p:clrMapOvr>
+</p:sld>
+</file>
+
+<file path=ppt/slides/slide2.xml><?xml version="1.0" encoding="utf-8"?>
+<p:sld xmlns:a="http://schemas.openxmlformats.org/drawingml/2006/main" xmlns:r="http://schemas.openxmlformats.org/officeDocument/2006/relationships" xmlns:p="http://schemas.openxmlformats.org/presentationml/2006/main">
+  <p:cSld>
+    <p:spTree>
+      <p:nvGrpSpPr>
+        <p:cNvPr id="1" name="">
+          <a:extLst>
+            <a:ext uri="{FF2B5EF4-FFF2-40B4-BE49-F238E27FC236}">
+              <a16:creationId xmlns:a16="http://schemas.microsoft.com/office/drawing/2014/main" id="{F373327C-D4E6-BE32-3591-485695813843}"/>
+            </a:ext>
+          </a:extLst>
+        </p:cNvPr>
+        <p:cNvGrpSpPr/>
+        <p:nvPr/>
+      </p:nvGrpSpPr>
+      <p:grpSpPr>
+        <a:xfrm>
+          <a:off x="0" y="0"/>
+          <a:ext cx="0" cy="0"/>
+          <a:chOff x="0" y="0"/>
+          <a:chExt cx="0" cy="0"/>
+        </a:xfrm>
+      </p:grpSpPr>
+      <p:sp>
+        <p:nvSpPr>
+          <p:cNvPr id="3" name="Content Placeholder 2">
+            <a:extLst>
+              <a:ext uri="{FF2B5EF4-FFF2-40B4-BE49-F238E27FC236}">
+                <a16:creationId xmlns:a16="http://schemas.microsoft.com/office/drawing/2014/main" id="{0ACE3C1D-8B73-E4BA-07CF-96FD24BF09D0}"/>
+              </a:ext>
+            </a:extLst>
+          </p:cNvPr>
+          <p:cNvSpPr>
+            <a:spLocks noGrp="1"/>
+          </p:cNvSpPr>
+          <p:nvPr>
+            <p:ph idx="1"/>
+          </p:nvPr>
+        </p:nvSpPr>
+        <p:spPr>
+          <a:xfrm>
+            <a:off x="838200" y="782320"/>
+            <a:ext cx="10378440" cy="5394643"/>
+          </a:xfrm>
+        </p:spPr>
+        <p:txBody>
+          <a:bodyPr>
+            <a:normAutofit fontScale="47500" lnSpcReduction="20000"/>
+          </a:bodyPr>
+          <a:lstStyle/>
+          <a:p>
+            <a:r>
+              <a:rPr lang="en-US" altLang="zh-CN" dirty="0"/>
+              <a:t>Run_RTM_1D_PDE.m</a:t>
+            </a:r>
+          </a:p>
+          <a:p>
+            <a:r>
+              <a:rPr lang="en-US" altLang="zh-CN" dirty="0"/>
+              <a:t>    ↓</a:t>
+            </a:r>
+          </a:p>
+          <a:p>
+            <a:r>
+              <a:rPr lang="en-US" altLang="zh-CN" dirty="0" err="1"/>
+              <a:t>Config_Baseline.m</a:t>
+            </a:r>
+            <a:r>
+              <a:rPr lang="en-US" altLang="zh-CN" dirty="0"/>
+              <a:t> / </a:t>
+            </a:r>
+            <a:r>
+              <a:rPr lang="en-US" altLang="zh-CN" dirty="0" err="1"/>
+              <a:t>Params_Static.m</a:t>
+            </a:r>
+            <a:endParaRPr lang="en-US" altLang="zh-CN" dirty="0"/>
+          </a:p>
+          <a:p>
+            <a:r>
+              <a:rPr lang="en-US" altLang="zh-CN" dirty="0"/>
+              <a:t>    ↓</a:t>
+            </a:r>
+          </a:p>
+          <a:p>
+            <a:r>
+              <a:rPr lang="en-US" altLang="zh-CN" dirty="0"/>
+              <a:t>Build_Grid_1D.m</a:t>
+            </a:r>
+          </a:p>
+          <a:p>
+            <a:r>
+              <a:rPr lang="en-US" altLang="zh-CN" dirty="0"/>
+              <a:t>    ↓</a:t>
+            </a:r>
+          </a:p>
+          <a:p>
+            <a:r>
+              <a:rPr lang="en-US" altLang="zh-CN" dirty="0" err="1"/>
+              <a:t>Build_Forcing_PDE.m</a:t>
+            </a:r>
+            <a:endParaRPr lang="en-US" altLang="zh-CN" dirty="0"/>
+          </a:p>
+          <a:p>
+            <a:r>
+              <a:rPr lang="en-US" altLang="zh-CN" dirty="0"/>
+              <a:t>    ↓</a:t>
+            </a:r>
+          </a:p>
+          <a:p>
+            <a:r>
+              <a:rPr lang="en-US" altLang="zh-CN" dirty="0" err="1"/>
+              <a:t>Initialize_PDE_State.m</a:t>
+            </a:r>
+            <a:endParaRPr lang="en-US" altLang="zh-CN" dirty="0"/>
+          </a:p>
+          <a:p>
+            <a:r>
+              <a:rPr lang="en-US" altLang="zh-CN" dirty="0"/>
+              <a:t>    ↓</a:t>
+            </a:r>
+          </a:p>
+          <a:p>
+            <a:r>
+              <a:rPr lang="en-US" altLang="zh-CN" dirty="0" err="1"/>
+              <a:t>Pack_State.m</a:t>
+            </a:r>
+            <a:r>
+              <a:rPr lang="en-US" altLang="zh-CN" dirty="0"/>
+              <a:t> / </a:t>
+            </a:r>
+            <a:r>
+              <a:rPr lang="en-US" altLang="zh-CN" dirty="0" err="1"/>
+              <a:t>Unpack_State.m</a:t>
+            </a:r>
+            <a:endParaRPr lang="en-US" altLang="zh-CN" dirty="0"/>
+          </a:p>
+          <a:p>
+            <a:r>
+              <a:rPr lang="en-US" altLang="zh-CN" dirty="0"/>
+              <a:t>    ↓</a:t>
+            </a:r>
+          </a:p>
+          <a:p>
+            <a:r>
+              <a:rPr lang="en-US" altLang="zh-CN" dirty="0" err="1"/>
+              <a:t>RTM_PDE_RHS.m</a:t>
+            </a:r>
+            <a:endParaRPr lang="en-US" altLang="zh-CN" dirty="0"/>
+          </a:p>
+          <a:p>
+            <a:r>
+              <a:rPr lang="en-US" altLang="zh-CN" dirty="0"/>
+              <a:t>    ↓</a:t>
+            </a:r>
+          </a:p>
+          <a:p>
+            <a:r>
+              <a:rPr lang="en-US" altLang="zh-CN" dirty="0" err="1"/>
+              <a:t>RTM_Reaction_Rates.m</a:t>
+            </a:r>
+            <a:endParaRPr lang="en-US" altLang="zh-CN" dirty="0"/>
+          </a:p>
+          <a:p>
+            <a:r>
+              <a:rPr lang="en-US" altLang="zh-CN" dirty="0"/>
+              <a:t>    ↓</a:t>
+            </a:r>
+          </a:p>
+          <a:p>
+            <a:r>
+              <a:rPr lang="en-US" altLang="zh-CN" dirty="0" err="1"/>
+              <a:t>RTM_Carbonate.m</a:t>
+            </a:r>
+            <a:r>
+              <a:rPr lang="en-US" altLang="zh-CN" dirty="0"/>
+              <a:t> / </a:t>
+            </a:r>
+            <a:r>
+              <a:rPr lang="en-US" altLang="zh-CN" dirty="0" err="1"/>
+              <a:t>RTM_Bubbling.m</a:t>
+            </a:r>
+            <a:endParaRPr lang="en-US" altLang="zh-CN" dirty="0"/>
+          </a:p>
+          <a:p>
+            <a:r>
+              <a:rPr lang="en-US" altLang="zh-CN" dirty="0"/>
+              <a:t>    ↓</a:t>
+            </a:r>
+          </a:p>
+          <a:p>
+            <a:r>
+              <a:rPr lang="en-US" altLang="zh-CN" dirty="0" err="1"/>
+              <a:t>Plot_PDE_Result.m</a:t>
+            </a:r>
+            <a:endParaRPr lang="zh-CN" altLang="en-US" dirty="0"/>
+          </a:p>
+        </p:txBody>
+      </p:sp>
+    </p:spTree>
+    <p:extLst>
+      <p:ext uri="{BB962C8B-B14F-4D97-AF65-F5344CB8AC3E}">
+        <p14:creationId xmlns:p14="http://schemas.microsoft.com/office/powerpoint/2010/main" val="1138235519"/>
       </p:ext>
     </p:extLst>
   </p:cSld>
@@ -4059,7 +4763,7 @@
           <p:cNvPr id="2" name="Title 1">
             <a:extLst>
               <a:ext uri="{FF2B5EF4-FFF2-40B4-BE49-F238E27FC236}">
-                <a16:creationId xmlns:a16="http://schemas.microsoft.com/office/drawing/2014/main" id="{A88FEAA0-5AED-128B-E1D2-5A8A3CA3BBA3}"/>
+                <a16:creationId xmlns:a16="http://schemas.microsoft.com/office/drawing/2014/main" id="{3C2E9CD7-B30C-9EBD-503B-0E24D0A0AF8A}"/>
               </a:ext>
             </a:extLst>
           </p:cNvPr>
@@ -4076,63 +4780,131 @@
           <a:lstStyle/>
           <a:p>
             <a:r>
+              <a:rPr lang="en-US" altLang="zh-CN" dirty="0"/>
+              <a:t>Run_RTM_1D_PDE.m</a:t>
+            </a:r>
+            <a:endParaRPr lang="zh-CN" altLang="en-US" dirty="0"/>
+          </a:p>
+        </p:txBody>
+      </p:sp>
+      <p:sp>
+        <p:nvSpPr>
+          <p:cNvPr id="3" name="Content Placeholder 2">
+            <a:extLst>
+              <a:ext uri="{FF2B5EF4-FFF2-40B4-BE49-F238E27FC236}">
+                <a16:creationId xmlns:a16="http://schemas.microsoft.com/office/drawing/2014/main" id="{B023166B-72E2-B8A9-7E33-A8D033FB84B6}"/>
+              </a:ext>
+            </a:extLst>
+          </p:cNvPr>
+          <p:cNvSpPr>
+            <a:spLocks noGrp="1"/>
+          </p:cNvSpPr>
+          <p:nvPr>
+            <p:ph idx="1"/>
+          </p:nvPr>
+        </p:nvSpPr>
+        <p:spPr/>
+        <p:txBody>
+          <a:bodyPr>
+            <a:normAutofit fontScale="55000" lnSpcReduction="20000"/>
+          </a:bodyPr>
+          <a:lstStyle/>
+          <a:p>
+            <a:r>
+              <a:rPr lang="en-US" altLang="zh-CN" dirty="0"/>
+              <a:t>Config / Params</a:t>
+            </a:r>
+          </a:p>
+          <a:p>
+            <a:r>
+              <a:rPr lang="en-US" altLang="zh-CN" dirty="0"/>
+              <a:t>   ↓</a:t>
+            </a:r>
+          </a:p>
+          <a:p>
+            <a:r>
+              <a:rPr lang="en-US" altLang="zh-CN" dirty="0"/>
+              <a:t>Grid</a:t>
+            </a:r>
+          </a:p>
+          <a:p>
+            <a:r>
+              <a:rPr lang="en-US" altLang="zh-CN" dirty="0"/>
+              <a:t>   ↓</a:t>
+            </a:r>
+          </a:p>
+          <a:p>
+            <a:r>
+              <a:rPr lang="en-US" altLang="zh-CN" dirty="0"/>
+              <a:t>Forcing</a:t>
+            </a:r>
+          </a:p>
+          <a:p>
+            <a:r>
+              <a:rPr lang="en-US" altLang="zh-CN" dirty="0"/>
+              <a:t>   ↓</a:t>
+            </a:r>
+          </a:p>
+          <a:p>
+            <a:r>
+              <a:rPr lang="en-US" altLang="zh-CN" dirty="0"/>
+              <a:t>Initial State</a:t>
+            </a:r>
+          </a:p>
+          <a:p>
+            <a:r>
+              <a:rPr lang="en-US" altLang="zh-CN" dirty="0"/>
+              <a:t>   ↓</a:t>
+            </a:r>
+          </a:p>
+          <a:p>
+            <a:r>
+              <a:rPr lang="en-US" altLang="zh-CN" dirty="0"/>
+              <a:t>Pack into Y0</a:t>
+            </a:r>
+          </a:p>
+          <a:p>
+            <a:r>
+              <a:rPr lang="en-US" altLang="zh-CN" dirty="0"/>
+              <a:t>   ↓</a:t>
+            </a:r>
+          </a:p>
+          <a:p>
+            <a:r>
+              <a:rPr lang="en-US" altLang="zh-CN" dirty="0"/>
+              <a:t>ode15s solves </a:t>
+            </a:r>
+            <a:r>
               <a:rPr lang="en-US" altLang="zh-CN" dirty="0" err="1"/>
-              <a:t>Config_Baseline.m</a:t>
-            </a:r>
-            <a:r>
-              <a:rPr lang="en-US" altLang="zh-CN" dirty="0"/>
-              <a:t> and </a:t>
-            </a:r>
-            <a:r>
-              <a:rPr lang="en-US" altLang="zh-CN" dirty="0" err="1"/>
-              <a:t>Params_Static.m</a:t>
-            </a:r>
-            <a:endParaRPr lang="zh-CN" altLang="en-US" dirty="0"/>
-          </a:p>
-        </p:txBody>
-      </p:sp>
-      <p:sp>
-        <p:nvSpPr>
-          <p:cNvPr id="3" name="Content Placeholder 2">
-            <a:extLst>
-              <a:ext uri="{FF2B5EF4-FFF2-40B4-BE49-F238E27FC236}">
-                <a16:creationId xmlns:a16="http://schemas.microsoft.com/office/drawing/2014/main" id="{34755817-7666-97AE-9A2C-72364A951CA6}"/>
-              </a:ext>
-            </a:extLst>
-          </p:cNvPr>
-          <p:cNvSpPr>
-            <a:spLocks noGrp="1"/>
-          </p:cNvSpPr>
-          <p:nvPr>
-            <p:ph idx="1"/>
-          </p:nvPr>
-        </p:nvSpPr>
-        <p:spPr/>
-        <p:txBody>
-          <a:bodyPr/>
-          <a:lstStyle/>
-          <a:p>
-            <a:r>
-              <a:rPr lang="en-US" altLang="zh-CN" dirty="0"/>
-              <a:t>baseline simulation setup</a:t>
-            </a:r>
-          </a:p>
-          <a:p>
-            <a:r>
-              <a:rPr lang="en-US" altLang="zh-CN" dirty="0"/>
-              <a:t>site setup and forcing</a:t>
-            </a:r>
-          </a:p>
-          <a:p>
-            <a:r>
-              <a:rPr lang="en-US" altLang="zh-CN" dirty="0"/>
-              <a:t>audited kinetic and stoichiometric parameters.</a:t>
-            </a:r>
-          </a:p>
-          <a:p>
-            <a:r>
-              <a:rPr lang="en-US" altLang="zh-CN" dirty="0"/>
-              <a:t>Some parameters are currently treated as static, but for validation and uncertainty analysis they may later become calibrated or sampled parameters.</a:t>
+              <a:t>dY</a:t>
+            </a:r>
+            <a:r>
+              <a:rPr lang="en-US" altLang="zh-CN" dirty="0"/>
+              <a:t>/dt = RTM_PDE_RHS</a:t>
+            </a:r>
+          </a:p>
+          <a:p>
+            <a:r>
+              <a:rPr lang="en-US" altLang="zh-CN" dirty="0"/>
+              <a:t>   ↓</a:t>
+            </a:r>
+          </a:p>
+          <a:p>
+            <a:r>
+              <a:rPr lang="en-US" altLang="zh-CN" dirty="0"/>
+              <a:t>Unpack final state</a:t>
+            </a:r>
+          </a:p>
+          <a:p>
+            <a:r>
+              <a:rPr lang="en-US" altLang="zh-CN" dirty="0"/>
+              <a:t>   ↓</a:t>
+            </a:r>
+          </a:p>
+          <a:p>
+            <a:r>
+              <a:rPr lang="en-US" altLang="zh-CN" dirty="0"/>
+              <a:t>Reaction diagnostics / summary / plot</a:t>
             </a:r>
             <a:endParaRPr lang="zh-CN" altLang="en-US" dirty="0"/>
           </a:p>
@@ -4141,7 +4913,7 @@
     </p:spTree>
     <p:extLst>
       <p:ext uri="{BB962C8B-B14F-4D97-AF65-F5344CB8AC3E}">
-        <p14:creationId xmlns:p14="http://schemas.microsoft.com/office/powerpoint/2010/main" val="3738298434"/>
+        <p14:creationId xmlns:p14="http://schemas.microsoft.com/office/powerpoint/2010/main" val="3853370587"/>
       </p:ext>
     </p:extLst>
   </p:cSld>
@@ -4173,6 +4945,120 @@
           <p:cNvPr id="2" name="Title 1">
             <a:extLst>
               <a:ext uri="{FF2B5EF4-FFF2-40B4-BE49-F238E27FC236}">
+                <a16:creationId xmlns:a16="http://schemas.microsoft.com/office/drawing/2014/main" id="{A88FEAA0-5AED-128B-E1D2-5A8A3CA3BBA3}"/>
+              </a:ext>
+            </a:extLst>
+          </p:cNvPr>
+          <p:cNvSpPr>
+            <a:spLocks noGrp="1"/>
+          </p:cNvSpPr>
+          <p:nvPr>
+            <p:ph type="title"/>
+          </p:nvPr>
+        </p:nvSpPr>
+        <p:spPr/>
+        <p:txBody>
+          <a:bodyPr/>
+          <a:lstStyle/>
+          <a:p>
+            <a:r>
+              <a:rPr lang="en-US" altLang="zh-CN" dirty="0" err="1"/>
+              <a:t>Config_Baseline.m</a:t>
+            </a:r>
+            <a:r>
+              <a:rPr lang="en-US" altLang="zh-CN" dirty="0"/>
+              <a:t> and </a:t>
+            </a:r>
+            <a:r>
+              <a:rPr lang="en-US" altLang="zh-CN" dirty="0" err="1"/>
+              <a:t>Params_Static.m</a:t>
+            </a:r>
+            <a:endParaRPr lang="zh-CN" altLang="en-US" dirty="0"/>
+          </a:p>
+        </p:txBody>
+      </p:sp>
+      <p:sp>
+        <p:nvSpPr>
+          <p:cNvPr id="3" name="Content Placeholder 2">
+            <a:extLst>
+              <a:ext uri="{FF2B5EF4-FFF2-40B4-BE49-F238E27FC236}">
+                <a16:creationId xmlns:a16="http://schemas.microsoft.com/office/drawing/2014/main" id="{34755817-7666-97AE-9A2C-72364A951CA6}"/>
+              </a:ext>
+            </a:extLst>
+          </p:cNvPr>
+          <p:cNvSpPr>
+            <a:spLocks noGrp="1"/>
+          </p:cNvSpPr>
+          <p:nvPr>
+            <p:ph idx="1"/>
+          </p:nvPr>
+        </p:nvSpPr>
+        <p:spPr/>
+        <p:txBody>
+          <a:bodyPr/>
+          <a:lstStyle/>
+          <a:p>
+            <a:r>
+              <a:rPr lang="en-US" altLang="zh-CN" dirty="0"/>
+              <a:t>baseline simulation setup</a:t>
+            </a:r>
+          </a:p>
+          <a:p>
+            <a:r>
+              <a:rPr lang="en-US" altLang="zh-CN" dirty="0"/>
+              <a:t>site setup and forcing</a:t>
+            </a:r>
+          </a:p>
+          <a:p>
+            <a:r>
+              <a:rPr lang="en-US" altLang="zh-CN" dirty="0"/>
+              <a:t>audited kinetic and stoichiometric parameters.</a:t>
+            </a:r>
+          </a:p>
+          <a:p>
+            <a:r>
+              <a:rPr lang="en-US" altLang="zh-CN" dirty="0"/>
+              <a:t>Some parameters are currently treated as static, but for validation and uncertainty analysis they may later become calibrated or sampled parameters.</a:t>
+            </a:r>
+            <a:endParaRPr lang="zh-CN" altLang="en-US" dirty="0"/>
+          </a:p>
+        </p:txBody>
+      </p:sp>
+    </p:spTree>
+    <p:extLst>
+      <p:ext uri="{BB962C8B-B14F-4D97-AF65-F5344CB8AC3E}">
+        <p14:creationId xmlns:p14="http://schemas.microsoft.com/office/powerpoint/2010/main" val="3738298434"/>
+      </p:ext>
+    </p:extLst>
+  </p:cSld>
+  <p:clrMapOvr>
+    <a:masterClrMapping/>
+  </p:clrMapOvr>
+</p:sld>
+</file>
+
+<file path=ppt/slides/slide5.xml><?xml version="1.0" encoding="utf-8"?>
+<p:sld xmlns:a="http://schemas.openxmlformats.org/drawingml/2006/main" xmlns:r="http://schemas.openxmlformats.org/officeDocument/2006/relationships" xmlns:p="http://schemas.openxmlformats.org/presentationml/2006/main">
+  <p:cSld>
+    <p:spTree>
+      <p:nvGrpSpPr>
+        <p:cNvPr id="1" name=""/>
+        <p:cNvGrpSpPr/>
+        <p:nvPr/>
+      </p:nvGrpSpPr>
+      <p:grpSpPr>
+        <a:xfrm>
+          <a:off x="0" y="0"/>
+          <a:ext cx="0" cy="0"/>
+          <a:chOff x="0" y="0"/>
+          <a:chExt cx="0" cy="0"/>
+        </a:xfrm>
+      </p:grpSpPr>
+      <p:sp>
+        <p:nvSpPr>
+          <p:cNvPr id="2" name="Title 1">
+            <a:extLst>
+              <a:ext uri="{FF2B5EF4-FFF2-40B4-BE49-F238E27FC236}">
                 <a16:creationId xmlns:a16="http://schemas.microsoft.com/office/drawing/2014/main" id="{1569BC4C-99DF-D460-DC41-031D94CA7DAE}"/>
               </a:ext>
             </a:extLst>
@@ -4329,7 +5215,7 @@
 </p:sld>
 </file>
 
-<file path=ppt/slides/slide5.xml><?xml version="1.0" encoding="utf-8"?>
+<file path=ppt/slides/slide6.xml><?xml version="1.0" encoding="utf-8"?>
 <p:sld xmlns:a="http://schemas.openxmlformats.org/drawingml/2006/main" xmlns:r="http://schemas.openxmlformats.org/officeDocument/2006/relationships" xmlns:p="http://schemas.openxmlformats.org/presentationml/2006/main">
   <p:cSld>
     <p:spTree>
@@ -4657,7 +5543,7 @@
 </p:sld>
 </file>
 
-<file path=ppt/slides/slide6.xml><?xml version="1.0" encoding="utf-8"?>
+<file path=ppt/slides/slide7.xml><?xml version="1.0" encoding="utf-8"?>
 <p:sld xmlns:a="http://schemas.openxmlformats.org/drawingml/2006/main" xmlns:r="http://schemas.openxmlformats.org/officeDocument/2006/relationships" xmlns:p="http://schemas.openxmlformats.org/presentationml/2006/main">
   <p:cSld>
     <p:spTree>
@@ -4704,7 +5590,7 @@
             </a:br>
             <a:r>
               <a:rPr lang="en-US" altLang="zh-CN" dirty="0"/>
-              <a:t>SAP1</a:t>
+              <a:t>SAP1 old</a:t>
             </a:r>
             <a:endParaRPr lang="zh-CN" altLang="en-US" dirty="0"/>
           </a:p>
@@ -4838,7 +5724,272 @@
 </p:sld>
 </file>
 
-<file path=ppt/slides/slide7.xml><?xml version="1.0" encoding="utf-8"?>
+<file path=ppt/slides/slide8.xml><?xml version="1.0" encoding="utf-8"?>
+<p:sld xmlns:a="http://schemas.openxmlformats.org/drawingml/2006/main" xmlns:r="http://schemas.openxmlformats.org/officeDocument/2006/relationships" xmlns:p="http://schemas.openxmlformats.org/presentationml/2006/main">
+  <p:cSld>
+    <p:spTree>
+      <p:nvGrpSpPr>
+        <p:cNvPr id="1" name=""/>
+        <p:cNvGrpSpPr/>
+        <p:nvPr/>
+      </p:nvGrpSpPr>
+      <p:grpSpPr>
+        <a:xfrm>
+          <a:off x="0" y="0"/>
+          <a:ext cx="0" cy="0"/>
+          <a:chOff x="0" y="0"/>
+          <a:chExt cx="0" cy="0"/>
+        </a:xfrm>
+      </p:grpSpPr>
+      <p:sp>
+        <p:nvSpPr>
+          <p:cNvPr id="2" name="Title 1">
+            <a:extLst>
+              <a:ext uri="{FF2B5EF4-FFF2-40B4-BE49-F238E27FC236}">
+                <a16:creationId xmlns:a16="http://schemas.microsoft.com/office/drawing/2014/main" id="{69E08ABE-8960-D2C4-FE9F-5859311070D9}"/>
+              </a:ext>
+            </a:extLst>
+          </p:cNvPr>
+          <p:cNvSpPr>
+            <a:spLocks noGrp="1"/>
+          </p:cNvSpPr>
+          <p:nvPr>
+            <p:ph type="title"/>
+          </p:nvPr>
+        </p:nvSpPr>
+        <p:spPr/>
+        <p:txBody>
+          <a:bodyPr/>
+          <a:lstStyle/>
+          <a:p>
+            <a:endParaRPr lang="zh-CN" altLang="en-US"/>
+          </a:p>
+        </p:txBody>
+      </p:sp>
+      <p:sp>
+        <p:nvSpPr>
+          <p:cNvPr id="3" name="Content Placeholder 2">
+            <a:extLst>
+              <a:ext uri="{FF2B5EF4-FFF2-40B4-BE49-F238E27FC236}">
+                <a16:creationId xmlns:a16="http://schemas.microsoft.com/office/drawing/2014/main" id="{D39EACD4-4716-C5E6-908E-B7AE21BAC98A}"/>
+              </a:ext>
+            </a:extLst>
+          </p:cNvPr>
+          <p:cNvSpPr>
+            <a:spLocks noGrp="1"/>
+          </p:cNvSpPr>
+          <p:nvPr>
+            <p:ph idx="1"/>
+          </p:nvPr>
+        </p:nvSpPr>
+        <p:spPr/>
+        <p:txBody>
+          <a:bodyPr/>
+          <a:lstStyle/>
+          <a:p>
+            <a:endParaRPr lang="zh-CN" altLang="en-US" dirty="0"/>
+          </a:p>
+        </p:txBody>
+      </p:sp>
+      <p:pic>
+        <p:nvPicPr>
+          <p:cNvPr id="5" name="Picture 4">
+            <a:extLst>
+              <a:ext uri="{FF2B5EF4-FFF2-40B4-BE49-F238E27FC236}">
+                <a16:creationId xmlns:a16="http://schemas.microsoft.com/office/drawing/2014/main" id="{C0CDC08C-587E-08C6-D70B-10D6588D9912}"/>
+              </a:ext>
+            </a:extLst>
+          </p:cNvPr>
+          <p:cNvPicPr>
+            <a:picLocks noChangeAspect="1"/>
+          </p:cNvPicPr>
+          <p:nvPr/>
+        </p:nvPicPr>
+        <p:blipFill>
+          <a:blip r:embed="rId2"/>
+          <a:stretch>
+            <a:fillRect/>
+          </a:stretch>
+        </p:blipFill>
+        <p:spPr>
+          <a:xfrm>
+            <a:off x="-179437" y="58270"/>
+            <a:ext cx="10946191" cy="6858000"/>
+          </a:xfrm>
+          <a:prstGeom prst="rect">
+            <a:avLst/>
+          </a:prstGeom>
+        </p:spPr>
+      </p:pic>
+      <p:pic>
+        <p:nvPicPr>
+          <p:cNvPr id="6" name="Picture 5">
+            <a:extLst>
+              <a:ext uri="{FF2B5EF4-FFF2-40B4-BE49-F238E27FC236}">
+                <a16:creationId xmlns:a16="http://schemas.microsoft.com/office/drawing/2014/main" id="{BA3A44EF-E25B-FC34-CBE8-0639A289287C}"/>
+              </a:ext>
+            </a:extLst>
+          </p:cNvPr>
+          <p:cNvPicPr>
+            <a:picLocks noChangeAspect="1"/>
+          </p:cNvPicPr>
+          <p:nvPr/>
+        </p:nvPicPr>
+        <p:blipFill>
+          <a:blip r:embed="rId3"/>
+          <a:srcRect l="4834" r="65148"/>
+          <a:stretch>
+            <a:fillRect/>
+          </a:stretch>
+        </p:blipFill>
+        <p:spPr>
+          <a:xfrm>
+            <a:off x="6972826" y="4587280"/>
+            <a:ext cx="1900518" cy="2463927"/>
+          </a:xfrm>
+          <a:prstGeom prst="rect">
+            <a:avLst/>
+          </a:prstGeom>
+        </p:spPr>
+      </p:pic>
+      <p:pic>
+        <p:nvPicPr>
+          <p:cNvPr id="7" name="Picture 6">
+            <a:extLst>
+              <a:ext uri="{FF2B5EF4-FFF2-40B4-BE49-F238E27FC236}">
+                <a16:creationId xmlns:a16="http://schemas.microsoft.com/office/drawing/2014/main" id="{374DCEE1-BAC2-88F0-A921-74C7E85B036A}"/>
+              </a:ext>
+            </a:extLst>
+          </p:cNvPr>
+          <p:cNvPicPr>
+            <a:picLocks noChangeAspect="1"/>
+          </p:cNvPicPr>
+          <p:nvPr/>
+        </p:nvPicPr>
+        <p:blipFill>
+          <a:blip r:embed="rId3"/>
+          <a:srcRect l="64516" r="5466"/>
+          <a:stretch>
+            <a:fillRect/>
+          </a:stretch>
+        </p:blipFill>
+        <p:spPr>
+          <a:xfrm>
+            <a:off x="10403541" y="0"/>
+            <a:ext cx="1900518" cy="2463927"/>
+          </a:xfrm>
+          <a:prstGeom prst="rect">
+            <a:avLst/>
+          </a:prstGeom>
+        </p:spPr>
+      </p:pic>
+      <p:pic>
+        <p:nvPicPr>
+          <p:cNvPr id="8" name="Picture 7">
+            <a:extLst>
+              <a:ext uri="{FF2B5EF4-FFF2-40B4-BE49-F238E27FC236}">
+                <a16:creationId xmlns:a16="http://schemas.microsoft.com/office/drawing/2014/main" id="{1C7705EC-35CD-71DC-19EE-A3A37444BA8D}"/>
+              </a:ext>
+            </a:extLst>
+          </p:cNvPr>
+          <p:cNvPicPr>
+            <a:picLocks noChangeAspect="1"/>
+          </p:cNvPicPr>
+          <p:nvPr/>
+        </p:nvPicPr>
+        <p:blipFill>
+          <a:blip r:embed="rId4"/>
+          <a:srcRect l="38297" r="32871"/>
+          <a:stretch>
+            <a:fillRect/>
+          </a:stretch>
+        </p:blipFill>
+        <p:spPr>
+          <a:xfrm>
+            <a:off x="1809528" y="-59271"/>
+            <a:ext cx="1839260" cy="2366072"/>
+          </a:xfrm>
+          <a:prstGeom prst="rect">
+            <a:avLst/>
+          </a:prstGeom>
+        </p:spPr>
+      </p:pic>
+      <p:pic>
+        <p:nvPicPr>
+          <p:cNvPr id="9" name="Picture 8">
+            <a:extLst>
+              <a:ext uri="{FF2B5EF4-FFF2-40B4-BE49-F238E27FC236}">
+                <a16:creationId xmlns:a16="http://schemas.microsoft.com/office/drawing/2014/main" id="{4214D052-6EF2-71AA-6F52-49DF6CB28447}"/>
+              </a:ext>
+            </a:extLst>
+          </p:cNvPr>
+          <p:cNvPicPr>
+            <a:picLocks noChangeAspect="1"/>
+          </p:cNvPicPr>
+          <p:nvPr/>
+        </p:nvPicPr>
+        <p:blipFill>
+          <a:blip r:embed="rId4"/>
+          <a:srcRect l="67360" r="3808"/>
+          <a:stretch>
+            <a:fillRect/>
+          </a:stretch>
+        </p:blipFill>
+        <p:spPr>
+          <a:xfrm>
+            <a:off x="5358205" y="2332074"/>
+            <a:ext cx="1705385" cy="2193851"/>
+          </a:xfrm>
+          <a:prstGeom prst="rect">
+            <a:avLst/>
+          </a:prstGeom>
+        </p:spPr>
+      </p:pic>
+      <p:pic>
+        <p:nvPicPr>
+          <p:cNvPr id="10" name="Picture 9">
+            <a:extLst>
+              <a:ext uri="{FF2B5EF4-FFF2-40B4-BE49-F238E27FC236}">
+                <a16:creationId xmlns:a16="http://schemas.microsoft.com/office/drawing/2014/main" id="{C25BC28E-2D1F-1576-971A-E226ED2BAD0D}"/>
+              </a:ext>
+            </a:extLst>
+          </p:cNvPr>
+          <p:cNvPicPr>
+            <a:picLocks noChangeAspect="1"/>
+          </p:cNvPicPr>
+          <p:nvPr/>
+        </p:nvPicPr>
+        <p:blipFill>
+          <a:blip r:embed="rId4"/>
+          <a:srcRect l="9791" r="62306"/>
+          <a:stretch>
+            <a:fillRect/>
+          </a:stretch>
+        </p:blipFill>
+        <p:spPr>
+          <a:xfrm>
+            <a:off x="8722366" y="2366072"/>
+            <a:ext cx="1839261" cy="2444876"/>
+          </a:xfrm>
+          <a:prstGeom prst="rect">
+            <a:avLst/>
+          </a:prstGeom>
+        </p:spPr>
+      </p:pic>
+    </p:spTree>
+    <p:extLst>
+      <p:ext uri="{BB962C8B-B14F-4D97-AF65-F5344CB8AC3E}">
+        <p14:creationId xmlns:p14="http://schemas.microsoft.com/office/powerpoint/2010/main" val="4217621759"/>
+      </p:ext>
+    </p:extLst>
+  </p:cSld>
+  <p:clrMapOvr>
+    <a:masterClrMapping/>
+  </p:clrMapOvr>
+</p:sld>
+</file>
+
+<file path=ppt/slides/slide9.xml><?xml version="1.0" encoding="utf-8"?>
 <p:sld xmlns:a="http://schemas.openxmlformats.org/drawingml/2006/main" xmlns:r="http://schemas.openxmlformats.org/officeDocument/2006/relationships" xmlns:p="http://schemas.openxmlformats.org/presentationml/2006/main">
   <p:cSld>
     <p:spTree>
@@ -5075,414 +6226,6 @@
     <p:extLst>
       <p:ext uri="{BB962C8B-B14F-4D97-AF65-F5344CB8AC3E}">
         <p14:creationId xmlns:p14="http://schemas.microsoft.com/office/powerpoint/2010/main" val="2880611703"/>
-      </p:ext>
-    </p:extLst>
-  </p:cSld>
-  <p:clrMapOvr>
-    <a:masterClrMapping/>
-  </p:clrMapOvr>
-</p:sld>
-</file>
-
-<file path=ppt/slides/slide8.xml><?xml version="1.0" encoding="utf-8"?>
-<p:sld xmlns:a="http://schemas.openxmlformats.org/drawingml/2006/main" xmlns:r="http://schemas.openxmlformats.org/officeDocument/2006/relationships" xmlns:p="http://schemas.openxmlformats.org/presentationml/2006/main">
-  <p:cSld>
-    <p:spTree>
-      <p:nvGrpSpPr>
-        <p:cNvPr id="1" name=""/>
-        <p:cNvGrpSpPr/>
-        <p:nvPr/>
-      </p:nvGrpSpPr>
-      <p:grpSpPr>
-        <a:xfrm>
-          <a:off x="0" y="0"/>
-          <a:ext cx="0" cy="0"/>
-          <a:chOff x="0" y="0"/>
-          <a:chExt cx="0" cy="0"/>
-        </a:xfrm>
-      </p:grpSpPr>
-      <p:sp>
-        <p:nvSpPr>
-          <p:cNvPr id="2" name="Title 1">
-            <a:extLst>
-              <a:ext uri="{FF2B5EF4-FFF2-40B4-BE49-F238E27FC236}">
-                <a16:creationId xmlns:a16="http://schemas.microsoft.com/office/drawing/2014/main" id="{2DCE93DC-C6A9-E1C9-319C-847EC6423BC7}"/>
-              </a:ext>
-            </a:extLst>
-          </p:cNvPr>
-          <p:cNvSpPr>
-            <a:spLocks noGrp="1"/>
-          </p:cNvSpPr>
-          <p:nvPr>
-            <p:ph type="title"/>
-          </p:nvPr>
-        </p:nvSpPr>
-        <p:spPr/>
-        <p:txBody>
-          <a:bodyPr/>
-          <a:lstStyle/>
-          <a:p>
-            <a:r>
-              <a:rPr lang="en-US" altLang="zh-CN" dirty="0"/>
-              <a:t>Geneva 1</a:t>
-            </a:r>
-            <a:endParaRPr lang="zh-CN" altLang="en-US" dirty="0"/>
-          </a:p>
-        </p:txBody>
-      </p:sp>
-      <p:sp>
-        <p:nvSpPr>
-          <p:cNvPr id="3" name="Content Placeholder 2">
-            <a:extLst>
-              <a:ext uri="{FF2B5EF4-FFF2-40B4-BE49-F238E27FC236}">
-                <a16:creationId xmlns:a16="http://schemas.microsoft.com/office/drawing/2014/main" id="{ADA9E384-6824-1ECD-0EBC-D33D3BDC8EFC}"/>
-              </a:ext>
-            </a:extLst>
-          </p:cNvPr>
-          <p:cNvSpPr>
-            <a:spLocks noGrp="1"/>
-          </p:cNvSpPr>
-          <p:nvPr>
-            <p:ph idx="1"/>
-          </p:nvPr>
-        </p:nvSpPr>
-        <p:spPr/>
-        <p:txBody>
-          <a:bodyPr/>
-          <a:lstStyle/>
-          <a:p>
-            <a:endParaRPr lang="zh-CN" altLang="en-US"/>
-          </a:p>
-        </p:txBody>
-      </p:sp>
-      <p:pic>
-        <p:nvPicPr>
-          <p:cNvPr id="6" name="Picture 5">
-            <a:extLst>
-              <a:ext uri="{FF2B5EF4-FFF2-40B4-BE49-F238E27FC236}">
-                <a16:creationId xmlns:a16="http://schemas.microsoft.com/office/drawing/2014/main" id="{605F6E41-94B2-CB3A-3F8F-C5B6B07CEFEC}"/>
-              </a:ext>
-            </a:extLst>
-          </p:cNvPr>
-          <p:cNvPicPr>
-            <a:picLocks noChangeAspect="1"/>
-          </p:cNvPicPr>
-          <p:nvPr/>
-        </p:nvPicPr>
-        <p:blipFill>
-          <a:blip r:embed="rId2"/>
-          <a:stretch>
-            <a:fillRect/>
-          </a:stretch>
-        </p:blipFill>
-        <p:spPr>
-          <a:xfrm>
-            <a:off x="0" y="2026750"/>
-            <a:ext cx="11608397" cy="4826248"/>
-          </a:xfrm>
-          <a:prstGeom prst="rect">
-            <a:avLst/>
-          </a:prstGeom>
-        </p:spPr>
-      </p:pic>
-      <p:pic>
-        <p:nvPicPr>
-          <p:cNvPr id="8" name="Picture 7">
-            <a:extLst>
-              <a:ext uri="{FF2B5EF4-FFF2-40B4-BE49-F238E27FC236}">
-                <a16:creationId xmlns:a16="http://schemas.microsoft.com/office/drawing/2014/main" id="{F36CB3C4-6C42-19C9-3978-84A7668A7ECF}"/>
-              </a:ext>
-            </a:extLst>
-          </p:cNvPr>
-          <p:cNvPicPr>
-            <a:picLocks noChangeAspect="1"/>
-          </p:cNvPicPr>
-          <p:nvPr/>
-        </p:nvPicPr>
-        <p:blipFill>
-          <a:blip r:embed="rId3"/>
-          <a:stretch>
-            <a:fillRect/>
-          </a:stretch>
-        </p:blipFill>
-        <p:spPr>
-          <a:xfrm>
-            <a:off x="3320929" y="-878155"/>
-            <a:ext cx="8160169" cy="2806844"/>
-          </a:xfrm>
-          <a:prstGeom prst="rect">
-            <a:avLst/>
-          </a:prstGeom>
-        </p:spPr>
-      </p:pic>
-      <p:pic>
-        <p:nvPicPr>
-          <p:cNvPr id="10" name="Picture 9">
-            <a:extLst>
-              <a:ext uri="{FF2B5EF4-FFF2-40B4-BE49-F238E27FC236}">
-                <a16:creationId xmlns:a16="http://schemas.microsoft.com/office/drawing/2014/main" id="{F6FED26D-906C-2AB8-502F-9FA648A3C455}"/>
-              </a:ext>
-            </a:extLst>
-          </p:cNvPr>
-          <p:cNvPicPr>
-            <a:picLocks noChangeAspect="1"/>
-          </p:cNvPicPr>
-          <p:nvPr/>
-        </p:nvPicPr>
-        <p:blipFill>
-          <a:blip r:embed="rId4"/>
-          <a:stretch>
-            <a:fillRect/>
-          </a:stretch>
-        </p:blipFill>
-        <p:spPr>
-          <a:xfrm>
-            <a:off x="6026314" y="4316016"/>
-            <a:ext cx="8198271" cy="2883048"/>
-          </a:xfrm>
-          <a:prstGeom prst="rect">
-            <a:avLst/>
-          </a:prstGeom>
-        </p:spPr>
-      </p:pic>
-      <p:pic>
-        <p:nvPicPr>
-          <p:cNvPr id="12" name="Picture 11">
-            <a:extLst>
-              <a:ext uri="{FF2B5EF4-FFF2-40B4-BE49-F238E27FC236}">
-                <a16:creationId xmlns:a16="http://schemas.microsoft.com/office/drawing/2014/main" id="{E49D340B-AF36-F0D4-BD65-9532E96B5589}"/>
-              </a:ext>
-            </a:extLst>
-          </p:cNvPr>
-          <p:cNvPicPr>
-            <a:picLocks noChangeAspect="1"/>
-          </p:cNvPicPr>
-          <p:nvPr/>
-        </p:nvPicPr>
-        <p:blipFill>
-          <a:blip r:embed="rId5"/>
-          <a:stretch>
-            <a:fillRect/>
-          </a:stretch>
-        </p:blipFill>
-        <p:spPr>
-          <a:xfrm>
-            <a:off x="2399206" y="1657552"/>
-            <a:ext cx="1949550" cy="2552831"/>
-          </a:xfrm>
-          <a:prstGeom prst="rect">
-            <a:avLst/>
-          </a:prstGeom>
-        </p:spPr>
-      </p:pic>
-    </p:spTree>
-    <p:extLst>
-      <p:ext uri="{BB962C8B-B14F-4D97-AF65-F5344CB8AC3E}">
-        <p14:creationId xmlns:p14="http://schemas.microsoft.com/office/powerpoint/2010/main" val="3260038964"/>
-      </p:ext>
-    </p:extLst>
-  </p:cSld>
-  <p:clrMapOvr>
-    <a:masterClrMapping/>
-  </p:clrMapOvr>
-</p:sld>
-</file>
-
-<file path=ppt/slides/slide9.xml><?xml version="1.0" encoding="utf-8"?>
-<p:sld xmlns:a="http://schemas.openxmlformats.org/drawingml/2006/main" xmlns:r="http://schemas.openxmlformats.org/officeDocument/2006/relationships" xmlns:p="http://schemas.openxmlformats.org/presentationml/2006/main">
-  <p:cSld>
-    <p:spTree>
-      <p:nvGrpSpPr>
-        <p:cNvPr id="1" name=""/>
-        <p:cNvGrpSpPr/>
-        <p:nvPr/>
-      </p:nvGrpSpPr>
-      <p:grpSpPr>
-        <a:xfrm>
-          <a:off x="0" y="0"/>
-          <a:ext cx="0" cy="0"/>
-          <a:chOff x="0" y="0"/>
-          <a:chExt cx="0" cy="0"/>
-        </a:xfrm>
-      </p:grpSpPr>
-      <p:sp>
-        <p:nvSpPr>
-          <p:cNvPr id="2" name="Title 1">
-            <a:extLst>
-              <a:ext uri="{FF2B5EF4-FFF2-40B4-BE49-F238E27FC236}">
-                <a16:creationId xmlns:a16="http://schemas.microsoft.com/office/drawing/2014/main" id="{2FEAD2D6-CDBD-29F0-7419-3037FD48219B}"/>
-              </a:ext>
-            </a:extLst>
-          </p:cNvPr>
-          <p:cNvSpPr>
-            <a:spLocks noGrp="1"/>
-          </p:cNvSpPr>
-          <p:nvPr>
-            <p:ph type="title"/>
-          </p:nvPr>
-        </p:nvSpPr>
-        <p:spPr/>
-        <p:txBody>
-          <a:bodyPr/>
-          <a:lstStyle/>
-          <a:p>
-            <a:r>
-              <a:rPr lang="en-US" altLang="zh-CN" dirty="0"/>
-              <a:t>Geneva 4</a:t>
-            </a:r>
-            <a:endParaRPr lang="zh-CN" altLang="en-US" dirty="0"/>
-          </a:p>
-        </p:txBody>
-      </p:sp>
-      <p:sp>
-        <p:nvSpPr>
-          <p:cNvPr id="3" name="Content Placeholder 2">
-            <a:extLst>
-              <a:ext uri="{FF2B5EF4-FFF2-40B4-BE49-F238E27FC236}">
-                <a16:creationId xmlns:a16="http://schemas.microsoft.com/office/drawing/2014/main" id="{A6299F5C-8D3A-CD17-31FA-DA1BEAFB0178}"/>
-              </a:ext>
-            </a:extLst>
-          </p:cNvPr>
-          <p:cNvSpPr>
-            <a:spLocks noGrp="1"/>
-          </p:cNvSpPr>
-          <p:nvPr>
-            <p:ph idx="1"/>
-          </p:nvPr>
-        </p:nvSpPr>
-        <p:spPr/>
-        <p:txBody>
-          <a:bodyPr/>
-          <a:lstStyle/>
-          <a:p>
-            <a:endParaRPr lang="zh-CN" altLang="en-US"/>
-          </a:p>
-        </p:txBody>
-      </p:sp>
-      <p:pic>
-        <p:nvPicPr>
-          <p:cNvPr id="5" name="Picture 4">
-            <a:extLst>
-              <a:ext uri="{FF2B5EF4-FFF2-40B4-BE49-F238E27FC236}">
-                <a16:creationId xmlns:a16="http://schemas.microsoft.com/office/drawing/2014/main" id="{5E00D8BC-06AB-C8A7-17D3-96D773CB6525}"/>
-              </a:ext>
-            </a:extLst>
-          </p:cNvPr>
-          <p:cNvPicPr>
-            <a:picLocks noChangeAspect="1"/>
-          </p:cNvPicPr>
-          <p:nvPr/>
-        </p:nvPicPr>
-        <p:blipFill>
-          <a:blip r:embed="rId2"/>
-          <a:stretch>
-            <a:fillRect/>
-          </a:stretch>
-        </p:blipFill>
-        <p:spPr>
-          <a:xfrm>
-            <a:off x="310852" y="1578644"/>
-            <a:ext cx="11570295" cy="4845299"/>
-          </a:xfrm>
-          <a:prstGeom prst="rect">
-            <a:avLst/>
-          </a:prstGeom>
-        </p:spPr>
-      </p:pic>
-      <p:pic>
-        <p:nvPicPr>
-          <p:cNvPr id="7" name="Picture 6">
-            <a:extLst>
-              <a:ext uri="{FF2B5EF4-FFF2-40B4-BE49-F238E27FC236}">
-                <a16:creationId xmlns:a16="http://schemas.microsoft.com/office/drawing/2014/main" id="{C9091CC3-DAE3-4B86-6A6B-65B2FA0976D3}"/>
-              </a:ext>
-            </a:extLst>
-          </p:cNvPr>
-          <p:cNvPicPr>
-            <a:picLocks noChangeAspect="1"/>
-          </p:cNvPicPr>
-          <p:nvPr/>
-        </p:nvPicPr>
-        <p:blipFill>
-          <a:blip r:embed="rId3"/>
-          <a:stretch>
-            <a:fillRect/>
-          </a:stretch>
-        </p:blipFill>
-        <p:spPr>
-          <a:xfrm>
-            <a:off x="6434249" y="3917332"/>
-            <a:ext cx="8020462" cy="3073558"/>
-          </a:xfrm>
-          <a:prstGeom prst="rect">
-            <a:avLst/>
-          </a:prstGeom>
-        </p:spPr>
-      </p:pic>
-      <p:pic>
-        <p:nvPicPr>
-          <p:cNvPr id="9" name="Picture 8">
-            <a:extLst>
-              <a:ext uri="{FF2B5EF4-FFF2-40B4-BE49-F238E27FC236}">
-                <a16:creationId xmlns:a16="http://schemas.microsoft.com/office/drawing/2014/main" id="{BF3D6A23-7481-0AD4-5AC2-FADD30B421C6}"/>
-              </a:ext>
-            </a:extLst>
-          </p:cNvPr>
-          <p:cNvPicPr>
-            <a:picLocks noChangeAspect="1"/>
-          </p:cNvPicPr>
-          <p:nvPr/>
-        </p:nvPicPr>
-        <p:blipFill>
-          <a:blip r:embed="rId4"/>
-          <a:stretch>
-            <a:fillRect/>
-          </a:stretch>
-        </p:blipFill>
-        <p:spPr>
-          <a:xfrm>
-            <a:off x="4114419" y="-1020036"/>
-            <a:ext cx="7417181" cy="2635385"/>
-          </a:xfrm>
-          <a:prstGeom prst="rect">
-            <a:avLst/>
-          </a:prstGeom>
-        </p:spPr>
-      </p:pic>
-      <p:pic>
-        <p:nvPicPr>
-          <p:cNvPr id="11" name="Picture 10">
-            <a:extLst>
-              <a:ext uri="{FF2B5EF4-FFF2-40B4-BE49-F238E27FC236}">
-                <a16:creationId xmlns:a16="http://schemas.microsoft.com/office/drawing/2014/main" id="{4BCC2E44-05AA-166B-1520-F8E4E772472D}"/>
-              </a:ext>
-            </a:extLst>
-          </p:cNvPr>
-          <p:cNvPicPr>
-            <a:picLocks noChangeAspect="1"/>
-          </p:cNvPicPr>
-          <p:nvPr/>
-        </p:nvPicPr>
-        <p:blipFill>
-          <a:blip r:embed="rId5"/>
-          <a:stretch>
-            <a:fillRect/>
-          </a:stretch>
-        </p:blipFill>
-        <p:spPr>
-          <a:xfrm>
-            <a:off x="1367107" y="4928802"/>
-            <a:ext cx="1847945" cy="2629035"/>
-          </a:xfrm>
-          <a:prstGeom prst="rect">
-            <a:avLst/>
-          </a:prstGeom>
-        </p:spPr>
-      </p:pic>
-    </p:spTree>
-    <p:extLst>
-      <p:ext uri="{BB962C8B-B14F-4D97-AF65-F5344CB8AC3E}">
-        <p14:creationId xmlns:p14="http://schemas.microsoft.com/office/powerpoint/2010/main" val="2392263516"/>
       </p:ext>
     </p:extLst>
   </p:cSld>
